--- a/docs/pptx/auc3/ritu-auc3-linsubhr-ratio-hosp10.pptx
+++ b/docs/pptx/auc3/ritu-auc3-linsubhr-ratio-hosp10.pptx
@@ -2443,7 +2443,7 @@
           </p:nvSpPr>
           <p:spPr>
             <a:xfrm>
-              <a:off x="1463479" y="2073503"/>
+              <a:off x="1464298" y="2073503"/>
               <a:ext cx="0" cy="3649639"/>
             </a:xfrm>
             <a:custGeom>
@@ -2486,7 +2486,7 @@
           </p:nvSpPr>
           <p:spPr>
             <a:xfrm>
-              <a:off x="3267849" y="2073503"/>
+              <a:off x="3268188" y="2073503"/>
               <a:ext cx="0" cy="3649639"/>
             </a:xfrm>
             <a:custGeom>
@@ -2529,7 +2529,7 @@
           </p:nvSpPr>
           <p:spPr>
             <a:xfrm>
-              <a:off x="5072218" y="2073503"/>
+              <a:off x="5072078" y="2073503"/>
               <a:ext cx="0" cy="3649639"/>
             </a:xfrm>
             <a:custGeom>
@@ -2572,7 +2572,7 @@
           </p:nvSpPr>
           <p:spPr>
             <a:xfrm>
-              <a:off x="6876587" y="2073503"/>
+              <a:off x="6875967" y="2073503"/>
               <a:ext cx="0" cy="3649639"/>
             </a:xfrm>
             <a:custGeom>
@@ -2830,7 +2830,7 @@
           </p:nvSpPr>
           <p:spPr>
             <a:xfrm>
-              <a:off x="2365664" y="2073503"/>
+              <a:off x="2366243" y="2073503"/>
               <a:ext cx="0" cy="3649639"/>
             </a:xfrm>
             <a:custGeom>
@@ -2873,7 +2873,7 @@
           </p:nvSpPr>
           <p:spPr>
             <a:xfrm>
-              <a:off x="4170033" y="2073503"/>
+              <a:off x="4170133" y="2073503"/>
               <a:ext cx="0" cy="3649639"/>
             </a:xfrm>
             <a:custGeom>
@@ -2916,7 +2916,7 @@
           </p:nvSpPr>
           <p:spPr>
             <a:xfrm>
-              <a:off x="5974402" y="2073503"/>
+              <a:off x="5974022" y="2073503"/>
               <a:ext cx="0" cy="3649639"/>
             </a:xfrm>
             <a:custGeom>
@@ -2959,7 +2959,7 @@
           </p:nvSpPr>
           <p:spPr>
             <a:xfrm>
-              <a:off x="7778772" y="2073503"/>
+              <a:off x="7777912" y="2073503"/>
               <a:ext cx="0" cy="3649639"/>
             </a:xfrm>
             <a:custGeom>
@@ -3003,476 +3003,473 @@
           <p:spPr>
             <a:xfrm>
               <a:off x="1172049" y="2073503"/>
-              <a:ext cx="7090630" cy="3449386"/>
+              <a:ext cx="7090630" cy="3449274"/>
             </a:xfrm>
             <a:custGeom>
               <a:avLst/>
               <a:pathLst>
-                <a:path w="7090630" h="3449386">
+                <a:path w="7090630" h="3449274">
                   <a:moveTo>
-                    <a:pt x="1145842" y="0"/>
+                    <a:pt x="1151743" y="0"/>
                   </a:moveTo>
                   <a:lnTo>
-                    <a:pt x="1145960" y="327"/>
-                  </a:lnTo>
-                  <a:lnTo>
-                    <a:pt x="1217582" y="188881"/>
-                  </a:lnTo>
-                  <a:lnTo>
-                    <a:pt x="1289205" y="367229"/>
-                  </a:lnTo>
-                  <a:lnTo>
-                    <a:pt x="1360827" y="535922"/>
-                  </a:lnTo>
-                  <a:lnTo>
-                    <a:pt x="1432450" y="695485"/>
-                  </a:lnTo>
-                  <a:lnTo>
-                    <a:pt x="1504073" y="846410"/>
-                  </a:lnTo>
-                  <a:lnTo>
-                    <a:pt x="1575695" y="989166"/>
-                  </a:lnTo>
-                  <a:lnTo>
-                    <a:pt x="1647318" y="1124195"/>
-                  </a:lnTo>
-                  <a:lnTo>
-                    <a:pt x="1718940" y="1251915"/>
-                  </a:lnTo>
-                  <a:lnTo>
-                    <a:pt x="1790563" y="1372722"/>
-                  </a:lnTo>
-                  <a:lnTo>
-                    <a:pt x="1862185" y="1486989"/>
-                  </a:lnTo>
-                  <a:lnTo>
-                    <a:pt x="1933808" y="1595072"/>
-                  </a:lnTo>
-                  <a:lnTo>
-                    <a:pt x="2005430" y="1697304"/>
-                  </a:lnTo>
-                  <a:lnTo>
-                    <a:pt x="2077053" y="1794002"/>
-                  </a:lnTo>
-                  <a:lnTo>
-                    <a:pt x="2148675" y="1885466"/>
-                  </a:lnTo>
-                  <a:lnTo>
-                    <a:pt x="2220298" y="1971979"/>
-                  </a:lnTo>
-                  <a:lnTo>
-                    <a:pt x="2291920" y="2053809"/>
-                  </a:lnTo>
-                  <a:lnTo>
-                    <a:pt x="2363543" y="2131210"/>
-                  </a:lnTo>
-                  <a:lnTo>
-                    <a:pt x="2435165" y="2204422"/>
-                  </a:lnTo>
-                  <a:lnTo>
-                    <a:pt x="2506788" y="2273670"/>
-                  </a:lnTo>
-                  <a:lnTo>
-                    <a:pt x="2578410" y="2339170"/>
-                  </a:lnTo>
-                  <a:lnTo>
-                    <a:pt x="2650033" y="2401125"/>
-                  </a:lnTo>
-                  <a:lnTo>
-                    <a:pt x="2721655" y="2459726"/>
-                  </a:lnTo>
-                  <a:lnTo>
-                    <a:pt x="2793278" y="2515155"/>
-                  </a:lnTo>
-                  <a:lnTo>
-                    <a:pt x="2864901" y="2567584"/>
-                  </a:lnTo>
-                  <a:lnTo>
-                    <a:pt x="2936523" y="2617175"/>
-                  </a:lnTo>
-                  <a:lnTo>
-                    <a:pt x="3008146" y="2644274"/>
-                  </a:lnTo>
-                  <a:lnTo>
-                    <a:pt x="3079768" y="2595771"/>
-                  </a:lnTo>
-                  <a:lnTo>
-                    <a:pt x="3151391" y="2544467"/>
-                  </a:lnTo>
-                  <a:lnTo>
-                    <a:pt x="3223013" y="2490197"/>
-                  </a:lnTo>
-                  <a:lnTo>
-                    <a:pt x="3294636" y="2432793"/>
-                  </a:lnTo>
-                  <a:lnTo>
-                    <a:pt x="3366258" y="2372071"/>
-                  </a:lnTo>
-                  <a:lnTo>
-                    <a:pt x="3437881" y="2307842"/>
-                  </a:lnTo>
-                  <a:lnTo>
-                    <a:pt x="3509503" y="2239901"/>
-                  </a:lnTo>
-                  <a:lnTo>
-                    <a:pt x="3581126" y="2168035"/>
-                  </a:lnTo>
-                  <a:lnTo>
-                    <a:pt x="3652748" y="2092017"/>
-                  </a:lnTo>
-                  <a:lnTo>
-                    <a:pt x="3724371" y="2011606"/>
-                  </a:lnTo>
-                  <a:lnTo>
-                    <a:pt x="3795993" y="1926550"/>
-                  </a:lnTo>
-                  <a:lnTo>
-                    <a:pt x="3867616" y="1836579"/>
-                  </a:lnTo>
-                  <a:lnTo>
-                    <a:pt x="3939238" y="1741410"/>
-                  </a:lnTo>
-                  <a:lnTo>
-                    <a:pt x="4010861" y="1640743"/>
-                  </a:lnTo>
-                  <a:lnTo>
-                    <a:pt x="4082483" y="1534259"/>
-                  </a:lnTo>
-                  <a:lnTo>
-                    <a:pt x="4154106" y="1421622"/>
-                  </a:lnTo>
-                  <a:lnTo>
-                    <a:pt x="4225729" y="1302478"/>
-                  </a:lnTo>
-                  <a:lnTo>
-                    <a:pt x="4297351" y="1176450"/>
-                  </a:lnTo>
-                  <a:lnTo>
-                    <a:pt x="4368974" y="1043141"/>
-                  </a:lnTo>
-                  <a:lnTo>
-                    <a:pt x="4440596" y="902129"/>
-                  </a:lnTo>
-                  <a:lnTo>
-                    <a:pt x="4512219" y="752970"/>
-                  </a:lnTo>
-                  <a:lnTo>
-                    <a:pt x="4583841" y="595193"/>
-                  </a:lnTo>
-                  <a:lnTo>
-                    <a:pt x="4655464" y="428300"/>
-                  </a:lnTo>
-                  <a:lnTo>
-                    <a:pt x="4727086" y="251765"/>
-                  </a:lnTo>
-                  <a:lnTo>
-                    <a:pt x="4798709" y="65029"/>
-                  </a:lnTo>
-                  <a:lnTo>
-                    <a:pt x="4822289" y="0"/>
+                    <a:pt x="1217582" y="174150"/>
+                  </a:lnTo>
+                  <a:lnTo>
+                    <a:pt x="1289205" y="353341"/>
+                  </a:lnTo>
+                  <a:lnTo>
+                    <a:pt x="1360827" y="522830"/>
+                  </a:lnTo>
+                  <a:lnTo>
+                    <a:pt x="1432450" y="683142"/>
+                  </a:lnTo>
+                  <a:lnTo>
+                    <a:pt x="1504073" y="834775"/>
+                  </a:lnTo>
+                  <a:lnTo>
+                    <a:pt x="1575695" y="978198"/>
+                  </a:lnTo>
+                  <a:lnTo>
+                    <a:pt x="1647318" y="1113855"/>
+                  </a:lnTo>
+                  <a:lnTo>
+                    <a:pt x="1718940" y="1242168"/>
+                  </a:lnTo>
+                  <a:lnTo>
+                    <a:pt x="1790563" y="1363533"/>
+                  </a:lnTo>
+                  <a:lnTo>
+                    <a:pt x="1862185" y="1478328"/>
+                  </a:lnTo>
+                  <a:lnTo>
+                    <a:pt x="1933808" y="1586907"/>
+                  </a:lnTo>
+                  <a:lnTo>
+                    <a:pt x="2005430" y="1689607"/>
+                  </a:lnTo>
+                  <a:lnTo>
+                    <a:pt x="2077053" y="1786747"/>
+                  </a:lnTo>
+                  <a:lnTo>
+                    <a:pt x="2148675" y="1878627"/>
+                  </a:lnTo>
+                  <a:lnTo>
+                    <a:pt x="2220298" y="1965533"/>
+                  </a:lnTo>
+                  <a:lnTo>
+                    <a:pt x="2291920" y="2047733"/>
+                  </a:lnTo>
+                  <a:lnTo>
+                    <a:pt x="2363543" y="2125483"/>
+                  </a:lnTo>
+                  <a:lnTo>
+                    <a:pt x="2435165" y="2199023"/>
+                  </a:lnTo>
+                  <a:lnTo>
+                    <a:pt x="2506788" y="2268582"/>
+                  </a:lnTo>
+                  <a:lnTo>
+                    <a:pt x="2578410" y="2334374"/>
+                  </a:lnTo>
+                  <a:lnTo>
+                    <a:pt x="2650033" y="2396605"/>
+                  </a:lnTo>
+                  <a:lnTo>
+                    <a:pt x="2721655" y="2455466"/>
+                  </a:lnTo>
+                  <a:lnTo>
+                    <a:pt x="2793278" y="2511140"/>
+                  </a:lnTo>
+                  <a:lnTo>
+                    <a:pt x="2864901" y="2563799"/>
+                  </a:lnTo>
+                  <a:lnTo>
+                    <a:pt x="2936523" y="2613608"/>
+                  </a:lnTo>
+                  <a:lnTo>
+                    <a:pt x="3008146" y="2647735"/>
+                  </a:lnTo>
+                  <a:lnTo>
+                    <a:pt x="3079768" y="2599419"/>
+                  </a:lnTo>
+                  <a:lnTo>
+                    <a:pt x="3151391" y="2548311"/>
+                  </a:lnTo>
+                  <a:lnTo>
+                    <a:pt x="3223013" y="2494249"/>
+                  </a:lnTo>
+                  <a:lnTo>
+                    <a:pt x="3294636" y="2437063"/>
+                  </a:lnTo>
+                  <a:lnTo>
+                    <a:pt x="3366258" y="2376572"/>
+                  </a:lnTo>
+                  <a:lnTo>
+                    <a:pt x="3437881" y="2312585"/>
+                  </a:lnTo>
+                  <a:lnTo>
+                    <a:pt x="3509503" y="2244900"/>
+                  </a:lnTo>
+                  <a:lnTo>
+                    <a:pt x="3581126" y="2173303"/>
+                  </a:lnTo>
+                  <a:lnTo>
+                    <a:pt x="3652748" y="2097569"/>
+                  </a:lnTo>
+                  <a:lnTo>
+                    <a:pt x="3724371" y="2017457"/>
+                  </a:lnTo>
+                  <a:lnTo>
+                    <a:pt x="3795993" y="1932716"/>
+                  </a:lnTo>
+                  <a:lnTo>
+                    <a:pt x="3867616" y="1843077"/>
+                  </a:lnTo>
+                  <a:lnTo>
+                    <a:pt x="3939238" y="1748258"/>
+                  </a:lnTo>
+                  <a:lnTo>
+                    <a:pt x="4010861" y="1647958"/>
+                  </a:lnTo>
+                  <a:lnTo>
+                    <a:pt x="4082483" y="1541862"/>
+                  </a:lnTo>
+                  <a:lnTo>
+                    <a:pt x="4154106" y="1429635"/>
+                  </a:lnTo>
+                  <a:lnTo>
+                    <a:pt x="4225729" y="1310921"/>
+                  </a:lnTo>
+                  <a:lnTo>
+                    <a:pt x="4297351" y="1185347"/>
+                  </a:lnTo>
+                  <a:lnTo>
+                    <a:pt x="4368974" y="1052516"/>
+                  </a:lnTo>
+                  <a:lnTo>
+                    <a:pt x="4440596" y="912007"/>
+                  </a:lnTo>
+                  <a:lnTo>
+                    <a:pt x="4512219" y="763378"/>
+                  </a:lnTo>
+                  <a:lnTo>
+                    <a:pt x="4583841" y="606160"/>
+                  </a:lnTo>
+                  <a:lnTo>
+                    <a:pt x="4655464" y="439855"/>
+                  </a:lnTo>
+                  <a:lnTo>
+                    <a:pt x="4727086" y="263939"/>
+                  </a:lnTo>
+                  <a:lnTo>
+                    <a:pt x="4798709" y="77857"/>
+                  </a:lnTo>
+                  <a:lnTo>
+                    <a:pt x="4827038" y="0"/>
                   </a:lnTo>
                   <a:lnTo>
                     <a:pt x="7090630" y="0"/>
                   </a:lnTo>
                   <a:lnTo>
-                    <a:pt x="7090630" y="3449386"/>
-                  </a:lnTo>
-                  <a:lnTo>
-                    <a:pt x="7019007" y="3447420"/>
-                  </a:lnTo>
-                  <a:lnTo>
-                    <a:pt x="6947385" y="3445341"/>
-                  </a:lnTo>
-                  <a:lnTo>
-                    <a:pt x="6875762" y="3443143"/>
-                  </a:lnTo>
-                  <a:lnTo>
-                    <a:pt x="6804139" y="3440819"/>
-                  </a:lnTo>
-                  <a:lnTo>
-                    <a:pt x="6732517" y="3438363"/>
-                  </a:lnTo>
-                  <a:lnTo>
-                    <a:pt x="6660894" y="3435766"/>
-                  </a:lnTo>
-                  <a:lnTo>
-                    <a:pt x="6589272" y="3433020"/>
-                  </a:lnTo>
-                  <a:lnTo>
-                    <a:pt x="6517649" y="3430117"/>
-                  </a:lnTo>
-                  <a:lnTo>
-                    <a:pt x="6446027" y="3427048"/>
-                  </a:lnTo>
-                  <a:lnTo>
-                    <a:pt x="6374404" y="3423803"/>
-                  </a:lnTo>
-                  <a:lnTo>
-                    <a:pt x="6302782" y="3420373"/>
-                  </a:lnTo>
-                  <a:lnTo>
-                    <a:pt x="6231159" y="3416746"/>
-                  </a:lnTo>
-                  <a:lnTo>
-                    <a:pt x="6159537" y="3412912"/>
-                  </a:lnTo>
-                  <a:lnTo>
-                    <a:pt x="6087914" y="3408859"/>
-                  </a:lnTo>
-                  <a:lnTo>
-                    <a:pt x="6016292" y="3404573"/>
-                  </a:lnTo>
-                  <a:lnTo>
-                    <a:pt x="5944669" y="3400042"/>
-                  </a:lnTo>
-                  <a:lnTo>
-                    <a:pt x="5873047" y="3395252"/>
-                  </a:lnTo>
-                  <a:lnTo>
-                    <a:pt x="5801424" y="3390188"/>
-                  </a:lnTo>
-                  <a:lnTo>
-                    <a:pt x="5729802" y="3384834"/>
-                  </a:lnTo>
-                  <a:lnTo>
-                    <a:pt x="5658179" y="3379174"/>
-                  </a:lnTo>
-                  <a:lnTo>
-                    <a:pt x="5586557" y="3373189"/>
-                  </a:lnTo>
-                  <a:lnTo>
-                    <a:pt x="5514934" y="3366862"/>
-                  </a:lnTo>
-                  <a:lnTo>
-                    <a:pt x="5443311" y="3360174"/>
-                  </a:lnTo>
-                  <a:lnTo>
-                    <a:pt x="5371689" y="3353102"/>
-                  </a:lnTo>
-                  <a:lnTo>
-                    <a:pt x="5300066" y="3345626"/>
-                  </a:lnTo>
-                  <a:lnTo>
-                    <a:pt x="5228444" y="3337722"/>
-                  </a:lnTo>
-                  <a:lnTo>
-                    <a:pt x="5156821" y="3329365"/>
-                  </a:lnTo>
-                  <a:lnTo>
-                    <a:pt x="5085199" y="3320530"/>
-                  </a:lnTo>
-                  <a:lnTo>
-                    <a:pt x="5013576" y="3311190"/>
-                  </a:lnTo>
-                  <a:lnTo>
-                    <a:pt x="4941954" y="3301315"/>
-                  </a:lnTo>
-                  <a:lnTo>
-                    <a:pt x="4870331" y="3290875"/>
-                  </a:lnTo>
-                  <a:lnTo>
-                    <a:pt x="4798709" y="3279838"/>
-                  </a:lnTo>
-                  <a:lnTo>
-                    <a:pt x="4727086" y="3268169"/>
-                  </a:lnTo>
-                  <a:lnTo>
-                    <a:pt x="4655464" y="3255832"/>
-                  </a:lnTo>
-                  <a:lnTo>
-                    <a:pt x="4583841" y="3242790"/>
-                  </a:lnTo>
-                  <a:lnTo>
-                    <a:pt x="4512219" y="3229000"/>
-                  </a:lnTo>
-                  <a:lnTo>
-                    <a:pt x="4440596" y="3214422"/>
-                  </a:lnTo>
-                  <a:lnTo>
-                    <a:pt x="4368974" y="3199010"/>
-                  </a:lnTo>
-                  <a:lnTo>
-                    <a:pt x="4297351" y="3182715"/>
-                  </a:lnTo>
-                  <a:lnTo>
-                    <a:pt x="4225729" y="3165488"/>
-                  </a:lnTo>
-                  <a:lnTo>
-                    <a:pt x="4154106" y="3147275"/>
-                  </a:lnTo>
-                  <a:lnTo>
-                    <a:pt x="4082483" y="3128020"/>
-                  </a:lnTo>
-                  <a:lnTo>
-                    <a:pt x="4010861" y="3107663"/>
-                  </a:lnTo>
-                  <a:lnTo>
-                    <a:pt x="3939238" y="3086141"/>
-                  </a:lnTo>
-                  <a:lnTo>
-                    <a:pt x="3867616" y="3063388"/>
-                  </a:lnTo>
-                  <a:lnTo>
-                    <a:pt x="3795993" y="3039332"/>
-                  </a:lnTo>
-                  <a:lnTo>
-                    <a:pt x="3724371" y="3013900"/>
-                  </a:lnTo>
-                  <a:lnTo>
-                    <a:pt x="3652748" y="2987012"/>
-                  </a:lnTo>
-                  <a:lnTo>
-                    <a:pt x="3581126" y="2958586"/>
-                  </a:lnTo>
-                  <a:lnTo>
-                    <a:pt x="3509503" y="2928533"/>
-                  </a:lnTo>
-                  <a:lnTo>
-                    <a:pt x="3437881" y="2896760"/>
-                  </a:lnTo>
-                  <a:lnTo>
-                    <a:pt x="3366258" y="2863169"/>
-                  </a:lnTo>
-                  <a:lnTo>
-                    <a:pt x="3294636" y="2827655"/>
-                  </a:lnTo>
-                  <a:lnTo>
-                    <a:pt x="3223013" y="2790109"/>
-                  </a:lnTo>
-                  <a:lnTo>
-                    <a:pt x="3151391" y="2750415"/>
-                  </a:lnTo>
-                  <a:lnTo>
-                    <a:pt x="3079768" y="2708449"/>
-                  </a:lnTo>
-                  <a:lnTo>
-                    <a:pt x="3008146" y="2664081"/>
-                  </a:lnTo>
-                  <a:lnTo>
-                    <a:pt x="2936523" y="2690127"/>
-                  </a:lnTo>
-                  <a:lnTo>
-                    <a:pt x="2864901" y="2733476"/>
-                  </a:lnTo>
-                  <a:lnTo>
-                    <a:pt x="2793278" y="2774457"/>
-                  </a:lnTo>
-                  <a:lnTo>
-                    <a:pt x="2721655" y="2813199"/>
-                  </a:lnTo>
-                  <a:lnTo>
-                    <a:pt x="2650033" y="2849825"/>
-                  </a:lnTo>
-                  <a:lnTo>
-                    <a:pt x="2578410" y="2884451"/>
-                  </a:lnTo>
-                  <a:lnTo>
-                    <a:pt x="2506788" y="2917186"/>
-                  </a:lnTo>
-                  <a:lnTo>
-                    <a:pt x="2435165" y="2948132"/>
-                  </a:lnTo>
-                  <a:lnTo>
-                    <a:pt x="2363543" y="2977388"/>
-                  </a:lnTo>
-                  <a:lnTo>
-                    <a:pt x="2291920" y="3005046"/>
-                  </a:lnTo>
-                  <a:lnTo>
-                    <a:pt x="2220298" y="3031193"/>
-                  </a:lnTo>
-                  <a:lnTo>
-                    <a:pt x="2148675" y="3055912"/>
-                  </a:lnTo>
-                  <a:lnTo>
-                    <a:pt x="2077053" y="3079281"/>
-                  </a:lnTo>
-                  <a:lnTo>
-                    <a:pt x="2005430" y="3101374"/>
-                  </a:lnTo>
-                  <a:lnTo>
-                    <a:pt x="1933808" y="3122260"/>
-                  </a:lnTo>
-                  <a:lnTo>
-                    <a:pt x="1862185" y="3142005"/>
-                  </a:lnTo>
-                  <a:lnTo>
-                    <a:pt x="1790563" y="3160671"/>
-                  </a:lnTo>
-                  <a:lnTo>
-                    <a:pt x="1718940" y="3178318"/>
-                  </a:lnTo>
-                  <a:lnTo>
-                    <a:pt x="1647318" y="3195001"/>
-                  </a:lnTo>
-                  <a:lnTo>
-                    <a:pt x="1575695" y="3210773"/>
-                  </a:lnTo>
-                  <a:lnTo>
-                    <a:pt x="1504073" y="3225683"/>
-                  </a:lnTo>
-                  <a:lnTo>
-                    <a:pt x="1432450" y="3239779"/>
-                  </a:lnTo>
-                  <a:lnTo>
-                    <a:pt x="1360827" y="3253104"/>
-                  </a:lnTo>
-                  <a:lnTo>
-                    <a:pt x="1289205" y="3265702"/>
-                  </a:lnTo>
-                  <a:lnTo>
-                    <a:pt x="1217582" y="3277612"/>
-                  </a:lnTo>
-                  <a:lnTo>
-                    <a:pt x="1145960" y="3288872"/>
-                  </a:lnTo>
-                  <a:lnTo>
-                    <a:pt x="1074337" y="3299516"/>
-                  </a:lnTo>
-                  <a:lnTo>
-                    <a:pt x="1002715" y="3309579"/>
-                  </a:lnTo>
-                  <a:lnTo>
-                    <a:pt x="931092" y="3319092"/>
-                  </a:lnTo>
-                  <a:lnTo>
-                    <a:pt x="859470" y="3328086"/>
-                  </a:lnTo>
-                  <a:lnTo>
-                    <a:pt x="787847" y="3336588"/>
-                  </a:lnTo>
-                  <a:lnTo>
-                    <a:pt x="716225" y="3344626"/>
-                  </a:lnTo>
-                  <a:lnTo>
-                    <a:pt x="644602" y="3352225"/>
-                  </a:lnTo>
-                  <a:lnTo>
-                    <a:pt x="572980" y="3359409"/>
-                  </a:lnTo>
-                  <a:lnTo>
-                    <a:pt x="501357" y="3366201"/>
-                  </a:lnTo>
-                  <a:lnTo>
-                    <a:pt x="429735" y="3372621"/>
-                  </a:lnTo>
-                  <a:lnTo>
-                    <a:pt x="358112" y="3378691"/>
-                  </a:lnTo>
-                  <a:lnTo>
-                    <a:pt x="286490" y="3384429"/>
-                  </a:lnTo>
-                  <a:lnTo>
-                    <a:pt x="214867" y="3389854"/>
-                  </a:lnTo>
-                  <a:lnTo>
-                    <a:pt x="143245" y="3394983"/>
-                  </a:lnTo>
-                  <a:lnTo>
-                    <a:pt x="71622" y="3399831"/>
-                  </a:lnTo>
-                  <a:lnTo>
-                    <a:pt x="0" y="3404415"/>
+                    <a:pt x="7090630" y="3449274"/>
+                  </a:lnTo>
+                  <a:lnTo>
+                    <a:pt x="7019007" y="3447301"/>
+                  </a:lnTo>
+                  <a:lnTo>
+                    <a:pt x="6947385" y="3445215"/>
+                  </a:lnTo>
+                  <a:lnTo>
+                    <a:pt x="6875762" y="3443009"/>
+                  </a:lnTo>
+                  <a:lnTo>
+                    <a:pt x="6804139" y="3440677"/>
+                  </a:lnTo>
+                  <a:lnTo>
+                    <a:pt x="6732517" y="3438212"/>
+                  </a:lnTo>
+                  <a:lnTo>
+                    <a:pt x="6660894" y="3435605"/>
+                  </a:lnTo>
+                  <a:lnTo>
+                    <a:pt x="6589272" y="3432849"/>
+                  </a:lnTo>
+                  <a:lnTo>
+                    <a:pt x="6517649" y="3429936"/>
+                  </a:lnTo>
+                  <a:lnTo>
+                    <a:pt x="6446027" y="3426856"/>
+                  </a:lnTo>
+                  <a:lnTo>
+                    <a:pt x="6374404" y="3423599"/>
+                  </a:lnTo>
+                  <a:lnTo>
+                    <a:pt x="6302782" y="3420156"/>
+                  </a:lnTo>
+                  <a:lnTo>
+                    <a:pt x="6231159" y="3416516"/>
+                  </a:lnTo>
+                  <a:lnTo>
+                    <a:pt x="6159537" y="3412668"/>
+                  </a:lnTo>
+                  <a:lnTo>
+                    <a:pt x="6087914" y="3408599"/>
+                  </a:lnTo>
+                  <a:lnTo>
+                    <a:pt x="6016292" y="3404298"/>
+                  </a:lnTo>
+                  <a:lnTo>
+                    <a:pt x="5944669" y="3399750"/>
+                  </a:lnTo>
+                  <a:lnTo>
+                    <a:pt x="5873047" y="3394942"/>
+                  </a:lnTo>
+                  <a:lnTo>
+                    <a:pt x="5801424" y="3389858"/>
+                  </a:lnTo>
+                  <a:lnTo>
+                    <a:pt x="5729802" y="3384484"/>
+                  </a:lnTo>
+                  <a:lnTo>
+                    <a:pt x="5658179" y="3378802"/>
+                  </a:lnTo>
+                  <a:lnTo>
+                    <a:pt x="5586557" y="3372795"/>
+                  </a:lnTo>
+                  <a:lnTo>
+                    <a:pt x="5514934" y="3366444"/>
+                  </a:lnTo>
+                  <a:lnTo>
+                    <a:pt x="5443311" y="3359729"/>
+                  </a:lnTo>
+                  <a:lnTo>
+                    <a:pt x="5371689" y="3352630"/>
+                  </a:lnTo>
+                  <a:lnTo>
+                    <a:pt x="5300066" y="3345125"/>
+                  </a:lnTo>
+                  <a:lnTo>
+                    <a:pt x="5228444" y="3337190"/>
+                  </a:lnTo>
+                  <a:lnTo>
+                    <a:pt x="5156821" y="3328800"/>
+                  </a:lnTo>
+                  <a:lnTo>
+                    <a:pt x="5085199" y="3319931"/>
+                  </a:lnTo>
+                  <a:lnTo>
+                    <a:pt x="5013576" y="3310554"/>
+                  </a:lnTo>
+                  <a:lnTo>
+                    <a:pt x="4941954" y="3300640"/>
+                  </a:lnTo>
+                  <a:lnTo>
+                    <a:pt x="4870331" y="3290158"/>
+                  </a:lnTo>
+                  <a:lnTo>
+                    <a:pt x="4798709" y="3279077"/>
+                  </a:lnTo>
+                  <a:lnTo>
+                    <a:pt x="4727086" y="3267361"/>
+                  </a:lnTo>
+                  <a:lnTo>
+                    <a:pt x="4655464" y="3254975"/>
+                  </a:lnTo>
+                  <a:lnTo>
+                    <a:pt x="4583841" y="3241880"/>
+                  </a:lnTo>
+                  <a:lnTo>
+                    <a:pt x="4512219" y="3228035"/>
+                  </a:lnTo>
+                  <a:lnTo>
+                    <a:pt x="4440596" y="3213397"/>
+                  </a:lnTo>
+                  <a:lnTo>
+                    <a:pt x="4368974" y="3197922"/>
+                  </a:lnTo>
+                  <a:lnTo>
+                    <a:pt x="4297351" y="3181561"/>
+                  </a:lnTo>
+                  <a:lnTo>
+                    <a:pt x="4225729" y="3164263"/>
+                  </a:lnTo>
+                  <a:lnTo>
+                    <a:pt x="4154106" y="3145975"/>
+                  </a:lnTo>
+                  <a:lnTo>
+                    <a:pt x="4082483" y="3126640"/>
+                  </a:lnTo>
+                  <a:lnTo>
+                    <a:pt x="4010861" y="3106199"/>
+                  </a:lnTo>
+                  <a:lnTo>
+                    <a:pt x="3939238" y="3084587"/>
+                  </a:lnTo>
+                  <a:lnTo>
+                    <a:pt x="3867616" y="3061738"/>
+                  </a:lnTo>
+                  <a:lnTo>
+                    <a:pt x="3795993" y="3037582"/>
+                  </a:lnTo>
+                  <a:lnTo>
+                    <a:pt x="3724371" y="3012042"/>
+                  </a:lnTo>
+                  <a:lnTo>
+                    <a:pt x="3652748" y="2985041"/>
+                  </a:lnTo>
+                  <a:lnTo>
+                    <a:pt x="3581126" y="2956494"/>
+                  </a:lnTo>
+                  <a:lnTo>
+                    <a:pt x="3509503" y="2926313"/>
+                  </a:lnTo>
+                  <a:lnTo>
+                    <a:pt x="3437881" y="2894405"/>
+                  </a:lnTo>
+                  <a:lnTo>
+                    <a:pt x="3366258" y="2860669"/>
+                  </a:lnTo>
+                  <a:lnTo>
+                    <a:pt x="3294636" y="2825003"/>
+                  </a:lnTo>
+                  <a:lnTo>
+                    <a:pt x="3223013" y="2787295"/>
+                  </a:lnTo>
+                  <a:lnTo>
+                    <a:pt x="3151391" y="2747429"/>
+                  </a:lnTo>
+                  <a:lnTo>
+                    <a:pt x="3079768" y="2705281"/>
+                  </a:lnTo>
+                  <a:lnTo>
+                    <a:pt x="3008146" y="2660720"/>
+                  </a:lnTo>
+                  <a:lnTo>
+                    <a:pt x="2936523" y="2693411"/>
+                  </a:lnTo>
+                  <a:lnTo>
+                    <a:pt x="2864901" y="2736591"/>
+                  </a:lnTo>
+                  <a:lnTo>
+                    <a:pt x="2793278" y="2777412"/>
+                  </a:lnTo>
+                  <a:lnTo>
+                    <a:pt x="2721655" y="2816003"/>
+                  </a:lnTo>
+                  <a:lnTo>
+                    <a:pt x="2650033" y="2852486"/>
+                  </a:lnTo>
+                  <a:lnTo>
+                    <a:pt x="2578410" y="2886975"/>
+                  </a:lnTo>
+                  <a:lnTo>
+                    <a:pt x="2506788" y="2919580"/>
+                  </a:lnTo>
+                  <a:lnTo>
+                    <a:pt x="2435165" y="2950404"/>
+                  </a:lnTo>
+                  <a:lnTo>
+                    <a:pt x="2363543" y="2979543"/>
+                  </a:lnTo>
+                  <a:lnTo>
+                    <a:pt x="2291920" y="3007090"/>
+                  </a:lnTo>
+                  <a:lnTo>
+                    <a:pt x="2220298" y="3033133"/>
+                  </a:lnTo>
+                  <a:lnTo>
+                    <a:pt x="2148675" y="3057752"/>
+                  </a:lnTo>
+                  <a:lnTo>
+                    <a:pt x="2077053" y="3081027"/>
+                  </a:lnTo>
+                  <a:lnTo>
+                    <a:pt x="2005430" y="3103030"/>
+                  </a:lnTo>
+                  <a:lnTo>
+                    <a:pt x="1933808" y="3123830"/>
+                  </a:lnTo>
+                  <a:lnTo>
+                    <a:pt x="1862185" y="3143494"/>
+                  </a:lnTo>
+                  <a:lnTo>
+                    <a:pt x="1790563" y="3162084"/>
+                  </a:lnTo>
+                  <a:lnTo>
+                    <a:pt x="1718940" y="3179658"/>
+                  </a:lnTo>
+                  <a:lnTo>
+                    <a:pt x="1647318" y="3196272"/>
+                  </a:lnTo>
+                  <a:lnTo>
+                    <a:pt x="1575695" y="3211979"/>
+                  </a:lnTo>
+                  <a:lnTo>
+                    <a:pt x="1504073" y="3226827"/>
+                  </a:lnTo>
+                  <a:lnTo>
+                    <a:pt x="1432450" y="3240864"/>
+                  </a:lnTo>
+                  <a:lnTo>
+                    <a:pt x="1360827" y="3254134"/>
+                  </a:lnTo>
+                  <a:lnTo>
+                    <a:pt x="1289205" y="3266679"/>
+                  </a:lnTo>
+                  <a:lnTo>
+                    <a:pt x="1217582" y="3278538"/>
+                  </a:lnTo>
+                  <a:lnTo>
+                    <a:pt x="1145960" y="3289750"/>
+                  </a:lnTo>
+                  <a:lnTo>
+                    <a:pt x="1074337" y="3300349"/>
+                  </a:lnTo>
+                  <a:lnTo>
+                    <a:pt x="1002715" y="3310369"/>
+                  </a:lnTo>
+                  <a:lnTo>
+                    <a:pt x="931092" y="3319842"/>
+                  </a:lnTo>
+                  <a:lnTo>
+                    <a:pt x="859470" y="3328797"/>
+                  </a:lnTo>
+                  <a:lnTo>
+                    <a:pt x="787847" y="3337263"/>
+                  </a:lnTo>
+                  <a:lnTo>
+                    <a:pt x="716225" y="3345266"/>
+                  </a:lnTo>
+                  <a:lnTo>
+                    <a:pt x="644602" y="3352832"/>
+                  </a:lnTo>
+                  <a:lnTo>
+                    <a:pt x="572980" y="3359984"/>
+                  </a:lnTo>
+                  <a:lnTo>
+                    <a:pt x="501357" y="3366746"/>
+                  </a:lnTo>
+                  <a:lnTo>
+                    <a:pt x="429735" y="3373139"/>
+                  </a:lnTo>
+                  <a:lnTo>
+                    <a:pt x="358112" y="3379182"/>
+                  </a:lnTo>
+                  <a:lnTo>
+                    <a:pt x="286490" y="3384895"/>
+                  </a:lnTo>
+                  <a:lnTo>
+                    <a:pt x="214867" y="3390295"/>
+                  </a:lnTo>
+                  <a:lnTo>
+                    <a:pt x="143245" y="3395401"/>
+                  </a:lnTo>
+                  <a:lnTo>
+                    <a:pt x="71622" y="3400228"/>
+                  </a:lnTo>
+                  <a:lnTo>
+                    <a:pt x="0" y="3404791"/>
                   </a:lnTo>
                   <a:close/>
                 </a:path>
@@ -3498,174 +3495,171 @@
           </p:nvSpPr>
           <p:spPr>
             <a:xfrm>
-              <a:off x="2317891" y="2073503"/>
-              <a:ext cx="3676446" cy="2644274"/>
+              <a:off x="2323793" y="2073503"/>
+              <a:ext cx="3675295" cy="2647735"/>
             </a:xfrm>
             <a:custGeom>
               <a:avLst/>
               <a:pathLst>
-                <a:path w="3676446" h="2644274">
+                <a:path w="3675295" h="2647735">
                   <a:moveTo>
                     <a:pt x="0" y="0"/>
                   </a:moveTo>
                   <a:lnTo>
-                    <a:pt x="117" y="327"/>
-                  </a:lnTo>
-                  <a:lnTo>
-                    <a:pt x="71740" y="188881"/>
-                  </a:lnTo>
-                  <a:lnTo>
-                    <a:pt x="143362" y="367229"/>
-                  </a:lnTo>
-                  <a:lnTo>
-                    <a:pt x="214985" y="535922"/>
-                  </a:lnTo>
-                  <a:lnTo>
-                    <a:pt x="286607" y="695485"/>
-                  </a:lnTo>
-                  <a:lnTo>
-                    <a:pt x="358230" y="846410"/>
-                  </a:lnTo>
-                  <a:lnTo>
-                    <a:pt x="429852" y="989166"/>
-                  </a:lnTo>
-                  <a:lnTo>
-                    <a:pt x="501475" y="1124195"/>
-                  </a:lnTo>
-                  <a:lnTo>
-                    <a:pt x="573098" y="1251915"/>
-                  </a:lnTo>
-                  <a:lnTo>
-                    <a:pt x="644720" y="1372722"/>
-                  </a:lnTo>
-                  <a:lnTo>
-                    <a:pt x="716343" y="1486989"/>
-                  </a:lnTo>
-                  <a:lnTo>
-                    <a:pt x="787965" y="1595072"/>
-                  </a:lnTo>
-                  <a:lnTo>
-                    <a:pt x="859588" y="1697304"/>
-                  </a:lnTo>
-                  <a:lnTo>
-                    <a:pt x="931210" y="1794002"/>
-                  </a:lnTo>
-                  <a:lnTo>
-                    <a:pt x="1002833" y="1885466"/>
-                  </a:lnTo>
-                  <a:lnTo>
-                    <a:pt x="1074455" y="1971979"/>
-                  </a:lnTo>
-                  <a:lnTo>
-                    <a:pt x="1146078" y="2053809"/>
-                  </a:lnTo>
-                  <a:lnTo>
-                    <a:pt x="1217700" y="2131210"/>
-                  </a:lnTo>
-                  <a:lnTo>
-                    <a:pt x="1289323" y="2204422"/>
-                  </a:lnTo>
-                  <a:lnTo>
-                    <a:pt x="1360945" y="2273670"/>
-                  </a:lnTo>
-                  <a:lnTo>
-                    <a:pt x="1432568" y="2339170"/>
-                  </a:lnTo>
-                  <a:lnTo>
-                    <a:pt x="1504190" y="2401125"/>
-                  </a:lnTo>
-                  <a:lnTo>
-                    <a:pt x="1575813" y="2459726"/>
-                  </a:lnTo>
-                  <a:lnTo>
-                    <a:pt x="1647435" y="2515155"/>
-                  </a:lnTo>
-                  <a:lnTo>
-                    <a:pt x="1719058" y="2567584"/>
-                  </a:lnTo>
-                  <a:lnTo>
-                    <a:pt x="1790680" y="2617175"/>
-                  </a:lnTo>
-                  <a:lnTo>
-                    <a:pt x="1862303" y="2644274"/>
-                  </a:lnTo>
-                  <a:lnTo>
-                    <a:pt x="1933926" y="2595771"/>
-                  </a:lnTo>
-                  <a:lnTo>
-                    <a:pt x="2005548" y="2544467"/>
-                  </a:lnTo>
-                  <a:lnTo>
-                    <a:pt x="2077171" y="2490197"/>
-                  </a:lnTo>
-                  <a:lnTo>
-                    <a:pt x="2148793" y="2432793"/>
-                  </a:lnTo>
-                  <a:lnTo>
-                    <a:pt x="2220416" y="2372071"/>
-                  </a:lnTo>
-                  <a:lnTo>
-                    <a:pt x="2292038" y="2307842"/>
-                  </a:lnTo>
-                  <a:lnTo>
-                    <a:pt x="2363661" y="2239901"/>
-                  </a:lnTo>
-                  <a:lnTo>
-                    <a:pt x="2435283" y="2168035"/>
-                  </a:lnTo>
-                  <a:lnTo>
-                    <a:pt x="2506906" y="2092017"/>
-                  </a:lnTo>
-                  <a:lnTo>
-                    <a:pt x="2578528" y="2011606"/>
-                  </a:lnTo>
-                  <a:lnTo>
-                    <a:pt x="2650151" y="1926550"/>
-                  </a:lnTo>
-                  <a:lnTo>
-                    <a:pt x="2721773" y="1836579"/>
-                  </a:lnTo>
-                  <a:lnTo>
-                    <a:pt x="2793396" y="1741410"/>
-                  </a:lnTo>
-                  <a:lnTo>
-                    <a:pt x="2865018" y="1640743"/>
-                  </a:lnTo>
-                  <a:lnTo>
-                    <a:pt x="2936641" y="1534259"/>
-                  </a:lnTo>
-                  <a:lnTo>
-                    <a:pt x="3008263" y="1421622"/>
-                  </a:lnTo>
-                  <a:lnTo>
-                    <a:pt x="3079886" y="1302478"/>
-                  </a:lnTo>
-                  <a:lnTo>
-                    <a:pt x="3151508" y="1176450"/>
-                  </a:lnTo>
-                  <a:lnTo>
-                    <a:pt x="3223131" y="1043141"/>
-                  </a:lnTo>
-                  <a:lnTo>
-                    <a:pt x="3294754" y="902129"/>
-                  </a:lnTo>
-                  <a:lnTo>
-                    <a:pt x="3366376" y="752970"/>
-                  </a:lnTo>
-                  <a:lnTo>
-                    <a:pt x="3437999" y="595193"/>
-                  </a:lnTo>
-                  <a:lnTo>
-                    <a:pt x="3509621" y="428300"/>
-                  </a:lnTo>
-                  <a:lnTo>
-                    <a:pt x="3581244" y="251765"/>
-                  </a:lnTo>
-                  <a:lnTo>
-                    <a:pt x="3652866" y="65029"/>
-                  </a:lnTo>
-                  <a:lnTo>
-                    <a:pt x="3676446" y="0"/>
+                    <a:pt x="65839" y="174150"/>
+                  </a:lnTo>
+                  <a:lnTo>
+                    <a:pt x="137461" y="353341"/>
+                  </a:lnTo>
+                  <a:lnTo>
+                    <a:pt x="209084" y="522830"/>
+                  </a:lnTo>
+                  <a:lnTo>
+                    <a:pt x="280706" y="683142"/>
+                  </a:lnTo>
+                  <a:lnTo>
+                    <a:pt x="352329" y="834775"/>
+                  </a:lnTo>
+                  <a:lnTo>
+                    <a:pt x="423951" y="978198"/>
+                  </a:lnTo>
+                  <a:lnTo>
+                    <a:pt x="495574" y="1113855"/>
+                  </a:lnTo>
+                  <a:lnTo>
+                    <a:pt x="567196" y="1242168"/>
+                  </a:lnTo>
+                  <a:lnTo>
+                    <a:pt x="638819" y="1363533"/>
+                  </a:lnTo>
+                  <a:lnTo>
+                    <a:pt x="710441" y="1478328"/>
+                  </a:lnTo>
+                  <a:lnTo>
+                    <a:pt x="782064" y="1586907"/>
+                  </a:lnTo>
+                  <a:lnTo>
+                    <a:pt x="853686" y="1689607"/>
+                  </a:lnTo>
+                  <a:lnTo>
+                    <a:pt x="925309" y="1786747"/>
+                  </a:lnTo>
+                  <a:lnTo>
+                    <a:pt x="996931" y="1878627"/>
+                  </a:lnTo>
+                  <a:lnTo>
+                    <a:pt x="1068554" y="1965533"/>
+                  </a:lnTo>
+                  <a:lnTo>
+                    <a:pt x="1140177" y="2047733"/>
+                  </a:lnTo>
+                  <a:lnTo>
+                    <a:pt x="1211799" y="2125483"/>
+                  </a:lnTo>
+                  <a:lnTo>
+                    <a:pt x="1283422" y="2199023"/>
+                  </a:lnTo>
+                  <a:lnTo>
+                    <a:pt x="1355044" y="2268582"/>
+                  </a:lnTo>
+                  <a:lnTo>
+                    <a:pt x="1426667" y="2334374"/>
+                  </a:lnTo>
+                  <a:lnTo>
+                    <a:pt x="1498289" y="2396605"/>
+                  </a:lnTo>
+                  <a:lnTo>
+                    <a:pt x="1569912" y="2455466"/>
+                  </a:lnTo>
+                  <a:lnTo>
+                    <a:pt x="1641534" y="2511140"/>
+                  </a:lnTo>
+                  <a:lnTo>
+                    <a:pt x="1713157" y="2563799"/>
+                  </a:lnTo>
+                  <a:lnTo>
+                    <a:pt x="1784779" y="2613608"/>
+                  </a:lnTo>
+                  <a:lnTo>
+                    <a:pt x="1856402" y="2647735"/>
+                  </a:lnTo>
+                  <a:lnTo>
+                    <a:pt x="1928024" y="2599419"/>
+                  </a:lnTo>
+                  <a:lnTo>
+                    <a:pt x="1999647" y="2548311"/>
+                  </a:lnTo>
+                  <a:lnTo>
+                    <a:pt x="2071269" y="2494249"/>
+                  </a:lnTo>
+                  <a:lnTo>
+                    <a:pt x="2142892" y="2437063"/>
+                  </a:lnTo>
+                  <a:lnTo>
+                    <a:pt x="2214514" y="2376572"/>
+                  </a:lnTo>
+                  <a:lnTo>
+                    <a:pt x="2286137" y="2312585"/>
+                  </a:lnTo>
+                  <a:lnTo>
+                    <a:pt x="2357759" y="2244900"/>
+                  </a:lnTo>
+                  <a:lnTo>
+                    <a:pt x="2429382" y="2173303"/>
+                  </a:lnTo>
+                  <a:lnTo>
+                    <a:pt x="2501005" y="2097569"/>
+                  </a:lnTo>
+                  <a:lnTo>
+                    <a:pt x="2572627" y="2017457"/>
+                  </a:lnTo>
+                  <a:lnTo>
+                    <a:pt x="2644250" y="1932716"/>
+                  </a:lnTo>
+                  <a:lnTo>
+                    <a:pt x="2715872" y="1843077"/>
+                  </a:lnTo>
+                  <a:lnTo>
+                    <a:pt x="2787495" y="1748258"/>
+                  </a:lnTo>
+                  <a:lnTo>
+                    <a:pt x="2859117" y="1647958"/>
+                  </a:lnTo>
+                  <a:lnTo>
+                    <a:pt x="2930740" y="1541862"/>
+                  </a:lnTo>
+                  <a:lnTo>
+                    <a:pt x="3002362" y="1429635"/>
+                  </a:lnTo>
+                  <a:lnTo>
+                    <a:pt x="3073985" y="1310921"/>
+                  </a:lnTo>
+                  <a:lnTo>
+                    <a:pt x="3145607" y="1185347"/>
+                  </a:lnTo>
+                  <a:lnTo>
+                    <a:pt x="3217230" y="1052516"/>
+                  </a:lnTo>
+                  <a:lnTo>
+                    <a:pt x="3288852" y="912007"/>
+                  </a:lnTo>
+                  <a:lnTo>
+                    <a:pt x="3360475" y="763378"/>
+                  </a:lnTo>
+                  <a:lnTo>
+                    <a:pt x="3432097" y="606160"/>
+                  </a:lnTo>
+                  <a:lnTo>
+                    <a:pt x="3503720" y="439855"/>
+                  </a:lnTo>
+                  <a:lnTo>
+                    <a:pt x="3575342" y="263939"/>
+                  </a:lnTo>
+                  <a:lnTo>
+                    <a:pt x="3646965" y="77857"/>
+                  </a:lnTo>
+                  <a:lnTo>
+                    <a:pt x="3675295" y="0"/>
                   </a:lnTo>
                 </a:path>
               </a:pathLst>
@@ -3685,312 +3679,312 @@
           </p:nvSpPr>
           <p:spPr>
             <a:xfrm>
-              <a:off x="1172049" y="4737584"/>
-              <a:ext cx="7090630" cy="785304"/>
+              <a:off x="1172049" y="4734223"/>
+              <a:ext cx="7090630" cy="788554"/>
             </a:xfrm>
             <a:custGeom>
               <a:avLst/>
               <a:pathLst>
-                <a:path w="7090630" h="785304">
+                <a:path w="7090630" h="788554">
                   <a:moveTo>
-                    <a:pt x="7090630" y="785304"/>
+                    <a:pt x="7090630" y="788554"/>
                   </a:moveTo>
                   <a:lnTo>
-                    <a:pt x="7019007" y="783338"/>
-                  </a:lnTo>
-                  <a:lnTo>
-                    <a:pt x="6947385" y="781259"/>
-                  </a:lnTo>
-                  <a:lnTo>
-                    <a:pt x="6875762" y="779061"/>
-                  </a:lnTo>
-                  <a:lnTo>
-                    <a:pt x="6804139" y="776738"/>
-                  </a:lnTo>
-                  <a:lnTo>
-                    <a:pt x="6732517" y="774281"/>
-                  </a:lnTo>
-                  <a:lnTo>
-                    <a:pt x="6660894" y="771684"/>
-                  </a:lnTo>
-                  <a:lnTo>
-                    <a:pt x="6589272" y="768938"/>
-                  </a:lnTo>
-                  <a:lnTo>
-                    <a:pt x="6517649" y="766035"/>
-                  </a:lnTo>
-                  <a:lnTo>
-                    <a:pt x="6446027" y="762966"/>
-                  </a:lnTo>
-                  <a:lnTo>
-                    <a:pt x="6374404" y="759722"/>
-                  </a:lnTo>
-                  <a:lnTo>
-                    <a:pt x="6302782" y="756291"/>
-                  </a:lnTo>
-                  <a:lnTo>
-                    <a:pt x="6231159" y="752665"/>
-                  </a:lnTo>
-                  <a:lnTo>
-                    <a:pt x="6159537" y="748831"/>
-                  </a:lnTo>
-                  <a:lnTo>
-                    <a:pt x="6087914" y="744777"/>
-                  </a:lnTo>
-                  <a:lnTo>
-                    <a:pt x="6016292" y="740491"/>
-                  </a:lnTo>
-                  <a:lnTo>
-                    <a:pt x="5944669" y="735961"/>
-                  </a:lnTo>
-                  <a:lnTo>
-                    <a:pt x="5873047" y="731170"/>
-                  </a:lnTo>
-                  <a:lnTo>
-                    <a:pt x="5801424" y="726106"/>
-                  </a:lnTo>
-                  <a:lnTo>
-                    <a:pt x="5729802" y="720752"/>
-                  </a:lnTo>
-                  <a:lnTo>
-                    <a:pt x="5658179" y="715092"/>
-                  </a:lnTo>
-                  <a:lnTo>
-                    <a:pt x="5586557" y="709107"/>
-                  </a:lnTo>
-                  <a:lnTo>
-                    <a:pt x="5514934" y="702781"/>
-                  </a:lnTo>
-                  <a:lnTo>
-                    <a:pt x="5443311" y="696092"/>
-                  </a:lnTo>
-                  <a:lnTo>
-                    <a:pt x="5371689" y="689020"/>
-                  </a:lnTo>
-                  <a:lnTo>
-                    <a:pt x="5300066" y="681544"/>
-                  </a:lnTo>
-                  <a:lnTo>
-                    <a:pt x="5228444" y="673640"/>
-                  </a:lnTo>
-                  <a:lnTo>
-                    <a:pt x="5156821" y="665283"/>
-                  </a:lnTo>
-                  <a:lnTo>
-                    <a:pt x="5085199" y="656448"/>
-                  </a:lnTo>
-                  <a:lnTo>
-                    <a:pt x="5013576" y="647108"/>
-                  </a:lnTo>
-                  <a:lnTo>
-                    <a:pt x="4941954" y="637233"/>
-                  </a:lnTo>
-                  <a:lnTo>
-                    <a:pt x="4870331" y="626793"/>
-                  </a:lnTo>
-                  <a:lnTo>
-                    <a:pt x="4798709" y="615756"/>
-                  </a:lnTo>
-                  <a:lnTo>
-                    <a:pt x="4727086" y="604087"/>
-                  </a:lnTo>
-                  <a:lnTo>
-                    <a:pt x="4655464" y="591750"/>
-                  </a:lnTo>
-                  <a:lnTo>
-                    <a:pt x="4583841" y="578708"/>
-                  </a:lnTo>
-                  <a:lnTo>
-                    <a:pt x="4512219" y="564919"/>
-                  </a:lnTo>
-                  <a:lnTo>
-                    <a:pt x="4440596" y="550340"/>
-                  </a:lnTo>
-                  <a:lnTo>
-                    <a:pt x="4368974" y="534928"/>
-                  </a:lnTo>
-                  <a:lnTo>
-                    <a:pt x="4297351" y="518633"/>
-                  </a:lnTo>
-                  <a:lnTo>
-                    <a:pt x="4225729" y="501406"/>
-                  </a:lnTo>
-                  <a:lnTo>
-                    <a:pt x="4154106" y="483194"/>
-                  </a:lnTo>
-                  <a:lnTo>
-                    <a:pt x="4082483" y="463939"/>
-                  </a:lnTo>
-                  <a:lnTo>
-                    <a:pt x="4010861" y="443582"/>
-                  </a:lnTo>
-                  <a:lnTo>
-                    <a:pt x="3939238" y="422060"/>
-                  </a:lnTo>
-                  <a:lnTo>
-                    <a:pt x="3867616" y="399306"/>
-                  </a:lnTo>
-                  <a:lnTo>
-                    <a:pt x="3795993" y="375250"/>
-                  </a:lnTo>
-                  <a:lnTo>
-                    <a:pt x="3724371" y="349818"/>
-                  </a:lnTo>
-                  <a:lnTo>
-                    <a:pt x="3652748" y="322930"/>
-                  </a:lnTo>
-                  <a:lnTo>
-                    <a:pt x="3581126" y="294504"/>
-                  </a:lnTo>
-                  <a:lnTo>
-                    <a:pt x="3509503" y="264451"/>
-                  </a:lnTo>
-                  <a:lnTo>
-                    <a:pt x="3437881" y="232678"/>
-                  </a:lnTo>
-                  <a:lnTo>
-                    <a:pt x="3366258" y="199087"/>
-                  </a:lnTo>
-                  <a:lnTo>
-                    <a:pt x="3294636" y="163573"/>
-                  </a:lnTo>
-                  <a:lnTo>
-                    <a:pt x="3223013" y="126028"/>
-                  </a:lnTo>
-                  <a:lnTo>
-                    <a:pt x="3151391" y="86333"/>
-                  </a:lnTo>
-                  <a:lnTo>
-                    <a:pt x="3079768" y="44367"/>
+                    <a:pt x="7019007" y="786581"/>
+                  </a:lnTo>
+                  <a:lnTo>
+                    <a:pt x="6947385" y="784494"/>
+                  </a:lnTo>
+                  <a:lnTo>
+                    <a:pt x="6875762" y="782289"/>
+                  </a:lnTo>
+                  <a:lnTo>
+                    <a:pt x="6804139" y="779957"/>
+                  </a:lnTo>
+                  <a:lnTo>
+                    <a:pt x="6732517" y="777491"/>
+                  </a:lnTo>
+                  <a:lnTo>
+                    <a:pt x="6660894" y="774885"/>
+                  </a:lnTo>
+                  <a:lnTo>
+                    <a:pt x="6589272" y="772129"/>
+                  </a:lnTo>
+                  <a:lnTo>
+                    <a:pt x="6517649" y="769216"/>
+                  </a:lnTo>
+                  <a:lnTo>
+                    <a:pt x="6446027" y="766136"/>
+                  </a:lnTo>
+                  <a:lnTo>
+                    <a:pt x="6374404" y="762879"/>
+                  </a:lnTo>
+                  <a:lnTo>
+                    <a:pt x="6302782" y="759436"/>
+                  </a:lnTo>
+                  <a:lnTo>
+                    <a:pt x="6231159" y="755796"/>
+                  </a:lnTo>
+                  <a:lnTo>
+                    <a:pt x="6159537" y="751948"/>
+                  </a:lnTo>
+                  <a:lnTo>
+                    <a:pt x="6087914" y="747879"/>
+                  </a:lnTo>
+                  <a:lnTo>
+                    <a:pt x="6016292" y="743577"/>
+                  </a:lnTo>
+                  <a:lnTo>
+                    <a:pt x="5944669" y="739030"/>
+                  </a:lnTo>
+                  <a:lnTo>
+                    <a:pt x="5873047" y="734221"/>
+                  </a:lnTo>
+                  <a:lnTo>
+                    <a:pt x="5801424" y="729138"/>
+                  </a:lnTo>
+                  <a:lnTo>
+                    <a:pt x="5729802" y="723764"/>
+                  </a:lnTo>
+                  <a:lnTo>
+                    <a:pt x="5658179" y="718082"/>
+                  </a:lnTo>
+                  <a:lnTo>
+                    <a:pt x="5586557" y="712075"/>
+                  </a:lnTo>
+                  <a:lnTo>
+                    <a:pt x="5514934" y="705723"/>
+                  </a:lnTo>
+                  <a:lnTo>
+                    <a:pt x="5443311" y="699009"/>
+                  </a:lnTo>
+                  <a:lnTo>
+                    <a:pt x="5371689" y="691910"/>
+                  </a:lnTo>
+                  <a:lnTo>
+                    <a:pt x="5300066" y="684404"/>
+                  </a:lnTo>
+                  <a:lnTo>
+                    <a:pt x="5228444" y="676469"/>
+                  </a:lnTo>
+                  <a:lnTo>
+                    <a:pt x="5156821" y="668080"/>
+                  </a:lnTo>
+                  <a:lnTo>
+                    <a:pt x="5085199" y="659211"/>
+                  </a:lnTo>
+                  <a:lnTo>
+                    <a:pt x="5013576" y="649834"/>
+                  </a:lnTo>
+                  <a:lnTo>
+                    <a:pt x="4941954" y="639920"/>
+                  </a:lnTo>
+                  <a:lnTo>
+                    <a:pt x="4870331" y="629438"/>
+                  </a:lnTo>
+                  <a:lnTo>
+                    <a:pt x="4798709" y="618357"/>
+                  </a:lnTo>
+                  <a:lnTo>
+                    <a:pt x="4727086" y="606641"/>
+                  </a:lnTo>
+                  <a:lnTo>
+                    <a:pt x="4655464" y="594255"/>
+                  </a:lnTo>
+                  <a:lnTo>
+                    <a:pt x="4583841" y="581159"/>
+                  </a:lnTo>
+                  <a:lnTo>
+                    <a:pt x="4512219" y="567315"/>
+                  </a:lnTo>
+                  <a:lnTo>
+                    <a:pt x="4440596" y="552677"/>
+                  </a:lnTo>
+                  <a:lnTo>
+                    <a:pt x="4368974" y="537202"/>
+                  </a:lnTo>
+                  <a:lnTo>
+                    <a:pt x="4297351" y="520840"/>
+                  </a:lnTo>
+                  <a:lnTo>
+                    <a:pt x="4225729" y="503543"/>
+                  </a:lnTo>
+                  <a:lnTo>
+                    <a:pt x="4154106" y="485255"/>
+                  </a:lnTo>
+                  <a:lnTo>
+                    <a:pt x="4082483" y="465920"/>
+                  </a:lnTo>
+                  <a:lnTo>
+                    <a:pt x="4010861" y="445479"/>
+                  </a:lnTo>
+                  <a:lnTo>
+                    <a:pt x="3939238" y="423867"/>
+                  </a:lnTo>
+                  <a:lnTo>
+                    <a:pt x="3867616" y="401018"/>
+                  </a:lnTo>
+                  <a:lnTo>
+                    <a:pt x="3795993" y="376862"/>
+                  </a:lnTo>
+                  <a:lnTo>
+                    <a:pt x="3724371" y="351322"/>
+                  </a:lnTo>
+                  <a:lnTo>
+                    <a:pt x="3652748" y="324321"/>
+                  </a:lnTo>
+                  <a:lnTo>
+                    <a:pt x="3581126" y="295774"/>
+                  </a:lnTo>
+                  <a:lnTo>
+                    <a:pt x="3509503" y="265593"/>
+                  </a:lnTo>
+                  <a:lnTo>
+                    <a:pt x="3437881" y="233684"/>
+                  </a:lnTo>
+                  <a:lnTo>
+                    <a:pt x="3366258" y="199949"/>
+                  </a:lnTo>
+                  <a:lnTo>
+                    <a:pt x="3294636" y="164283"/>
+                  </a:lnTo>
+                  <a:lnTo>
+                    <a:pt x="3223013" y="126575"/>
+                  </a:lnTo>
+                  <a:lnTo>
+                    <a:pt x="3151391" y="86709"/>
+                  </a:lnTo>
+                  <a:lnTo>
+                    <a:pt x="3079768" y="44561"/>
                   </a:lnTo>
                   <a:lnTo>
                     <a:pt x="3008146" y="0"/>
                   </a:lnTo>
                   <a:lnTo>
-                    <a:pt x="2936523" y="26045"/>
-                  </a:lnTo>
-                  <a:lnTo>
-                    <a:pt x="2864901" y="69394"/>
-                  </a:lnTo>
-                  <a:lnTo>
-                    <a:pt x="2793278" y="110375"/>
-                  </a:lnTo>
-                  <a:lnTo>
-                    <a:pt x="2721655" y="149117"/>
-                  </a:lnTo>
-                  <a:lnTo>
-                    <a:pt x="2650033" y="185744"/>
-                  </a:lnTo>
-                  <a:lnTo>
-                    <a:pt x="2578410" y="220369"/>
-                  </a:lnTo>
-                  <a:lnTo>
-                    <a:pt x="2506788" y="253104"/>
-                  </a:lnTo>
-                  <a:lnTo>
-                    <a:pt x="2435165" y="284050"/>
-                  </a:lnTo>
-                  <a:lnTo>
-                    <a:pt x="2363543" y="313306"/>
-                  </a:lnTo>
-                  <a:lnTo>
-                    <a:pt x="2291920" y="340964"/>
-                  </a:lnTo>
-                  <a:lnTo>
-                    <a:pt x="2220298" y="367112"/>
-                  </a:lnTo>
-                  <a:lnTo>
-                    <a:pt x="2148675" y="391831"/>
-                  </a:lnTo>
-                  <a:lnTo>
-                    <a:pt x="2077053" y="415200"/>
-                  </a:lnTo>
-                  <a:lnTo>
-                    <a:pt x="2005430" y="437292"/>
-                  </a:lnTo>
-                  <a:lnTo>
-                    <a:pt x="1933808" y="458178"/>
-                  </a:lnTo>
-                  <a:lnTo>
-                    <a:pt x="1862185" y="477923"/>
-                  </a:lnTo>
-                  <a:lnTo>
-                    <a:pt x="1790563" y="496589"/>
-                  </a:lnTo>
-                  <a:lnTo>
-                    <a:pt x="1718940" y="514236"/>
-                  </a:lnTo>
-                  <a:lnTo>
-                    <a:pt x="1647318" y="530919"/>
-                  </a:lnTo>
-                  <a:lnTo>
-                    <a:pt x="1575695" y="546691"/>
-                  </a:lnTo>
-                  <a:lnTo>
-                    <a:pt x="1504073" y="561601"/>
-                  </a:lnTo>
-                  <a:lnTo>
-                    <a:pt x="1432450" y="575697"/>
-                  </a:lnTo>
-                  <a:lnTo>
-                    <a:pt x="1360827" y="589023"/>
-                  </a:lnTo>
-                  <a:lnTo>
-                    <a:pt x="1289205" y="601621"/>
-                  </a:lnTo>
-                  <a:lnTo>
-                    <a:pt x="1217582" y="613531"/>
-                  </a:lnTo>
-                  <a:lnTo>
-                    <a:pt x="1145960" y="624790"/>
-                  </a:lnTo>
-                  <a:lnTo>
-                    <a:pt x="1074337" y="635434"/>
-                  </a:lnTo>
-                  <a:lnTo>
-                    <a:pt x="1002715" y="645497"/>
-                  </a:lnTo>
-                  <a:lnTo>
-                    <a:pt x="931092" y="655010"/>
-                  </a:lnTo>
-                  <a:lnTo>
-                    <a:pt x="859470" y="664004"/>
-                  </a:lnTo>
-                  <a:lnTo>
-                    <a:pt x="787847" y="672507"/>
-                  </a:lnTo>
-                  <a:lnTo>
-                    <a:pt x="716225" y="680544"/>
-                  </a:lnTo>
-                  <a:lnTo>
-                    <a:pt x="644602" y="688143"/>
-                  </a:lnTo>
-                  <a:lnTo>
-                    <a:pt x="572980" y="695327"/>
-                  </a:lnTo>
-                  <a:lnTo>
-                    <a:pt x="501357" y="702119"/>
-                  </a:lnTo>
-                  <a:lnTo>
-                    <a:pt x="429735" y="708539"/>
-                  </a:lnTo>
-                  <a:lnTo>
-                    <a:pt x="358112" y="714609"/>
-                  </a:lnTo>
-                  <a:lnTo>
-                    <a:pt x="286490" y="720347"/>
-                  </a:lnTo>
-                  <a:lnTo>
-                    <a:pt x="214867" y="725772"/>
-                  </a:lnTo>
-                  <a:lnTo>
-                    <a:pt x="143245" y="730901"/>
-                  </a:lnTo>
-                  <a:lnTo>
-                    <a:pt x="71622" y="735749"/>
-                  </a:lnTo>
-                  <a:lnTo>
-                    <a:pt x="0" y="740333"/>
+                    <a:pt x="2936523" y="32690"/>
+                  </a:lnTo>
+                  <a:lnTo>
+                    <a:pt x="2864901" y="75871"/>
+                  </a:lnTo>
+                  <a:lnTo>
+                    <a:pt x="2793278" y="116692"/>
+                  </a:lnTo>
+                  <a:lnTo>
+                    <a:pt x="2721655" y="155283"/>
+                  </a:lnTo>
+                  <a:lnTo>
+                    <a:pt x="2650033" y="191766"/>
+                  </a:lnTo>
+                  <a:lnTo>
+                    <a:pt x="2578410" y="226255"/>
+                  </a:lnTo>
+                  <a:lnTo>
+                    <a:pt x="2506788" y="258860"/>
+                  </a:lnTo>
+                  <a:lnTo>
+                    <a:pt x="2435165" y="289683"/>
+                  </a:lnTo>
+                  <a:lnTo>
+                    <a:pt x="2363543" y="318823"/>
+                  </a:lnTo>
+                  <a:lnTo>
+                    <a:pt x="2291920" y="346370"/>
+                  </a:lnTo>
+                  <a:lnTo>
+                    <a:pt x="2220298" y="372413"/>
+                  </a:lnTo>
+                  <a:lnTo>
+                    <a:pt x="2148675" y="397032"/>
+                  </a:lnTo>
+                  <a:lnTo>
+                    <a:pt x="2077053" y="420307"/>
+                  </a:lnTo>
+                  <a:lnTo>
+                    <a:pt x="2005430" y="442309"/>
+                  </a:lnTo>
+                  <a:lnTo>
+                    <a:pt x="1933808" y="463110"/>
+                  </a:lnTo>
+                  <a:lnTo>
+                    <a:pt x="1862185" y="482774"/>
+                  </a:lnTo>
+                  <a:lnTo>
+                    <a:pt x="1790563" y="501364"/>
+                  </a:lnTo>
+                  <a:lnTo>
+                    <a:pt x="1718940" y="518938"/>
+                  </a:lnTo>
+                  <a:lnTo>
+                    <a:pt x="1647318" y="535552"/>
+                  </a:lnTo>
+                  <a:lnTo>
+                    <a:pt x="1575695" y="551259"/>
+                  </a:lnTo>
+                  <a:lnTo>
+                    <a:pt x="1504073" y="566107"/>
+                  </a:lnTo>
+                  <a:lnTo>
+                    <a:pt x="1432450" y="580144"/>
+                  </a:lnTo>
+                  <a:lnTo>
+                    <a:pt x="1360827" y="593414"/>
+                  </a:lnTo>
+                  <a:lnTo>
+                    <a:pt x="1289205" y="605959"/>
+                  </a:lnTo>
+                  <a:lnTo>
+                    <a:pt x="1217582" y="617818"/>
+                  </a:lnTo>
+                  <a:lnTo>
+                    <a:pt x="1145960" y="629030"/>
+                  </a:lnTo>
+                  <a:lnTo>
+                    <a:pt x="1074337" y="639629"/>
+                  </a:lnTo>
+                  <a:lnTo>
+                    <a:pt x="1002715" y="649649"/>
+                  </a:lnTo>
+                  <a:lnTo>
+                    <a:pt x="931092" y="659122"/>
+                  </a:lnTo>
+                  <a:lnTo>
+                    <a:pt x="859470" y="668077"/>
+                  </a:lnTo>
+                  <a:lnTo>
+                    <a:pt x="787847" y="676542"/>
+                  </a:lnTo>
+                  <a:lnTo>
+                    <a:pt x="716225" y="684546"/>
+                  </a:lnTo>
+                  <a:lnTo>
+                    <a:pt x="644602" y="692112"/>
+                  </a:lnTo>
+                  <a:lnTo>
+                    <a:pt x="572980" y="699264"/>
+                  </a:lnTo>
+                  <a:lnTo>
+                    <a:pt x="501357" y="706026"/>
+                  </a:lnTo>
+                  <a:lnTo>
+                    <a:pt x="429735" y="712418"/>
+                  </a:lnTo>
+                  <a:lnTo>
+                    <a:pt x="358112" y="718461"/>
+                  </a:lnTo>
+                  <a:lnTo>
+                    <a:pt x="286490" y="724174"/>
+                  </a:lnTo>
+                  <a:lnTo>
+                    <a:pt x="214867" y="729575"/>
+                  </a:lnTo>
+                  <a:lnTo>
+                    <a:pt x="143245" y="734681"/>
+                  </a:lnTo>
+                  <a:lnTo>
+                    <a:pt x="71622" y="739508"/>
+                  </a:lnTo>
+                  <a:lnTo>
+                    <a:pt x="0" y="744071"/>
                   </a:lnTo>
                 </a:path>
               </a:pathLst>
@@ -4010,282 +4004,282 @@
           </p:nvSpPr>
           <p:spPr>
             <a:xfrm>
-              <a:off x="1172049" y="4715334"/>
-              <a:ext cx="7090630" cy="21430"/>
+              <a:off x="1172049" y="4715346"/>
+              <a:ext cx="7090630" cy="21436"/>
             </a:xfrm>
             <a:custGeom>
               <a:avLst/>
               <a:pathLst>
-                <a:path w="7090630" h="21430">
+                <a:path w="7090630" h="21436">
                   <a:moveTo>
-                    <a:pt x="0" y="21430"/>
+                    <a:pt x="0" y="21436"/>
                   </a:moveTo>
                   <a:lnTo>
-                    <a:pt x="71622" y="21216"/>
-                  </a:lnTo>
-                  <a:lnTo>
-                    <a:pt x="143245" y="21003"/>
-                  </a:lnTo>
-                  <a:lnTo>
-                    <a:pt x="214867" y="20789"/>
-                  </a:lnTo>
-                  <a:lnTo>
-                    <a:pt x="286490" y="20575"/>
-                  </a:lnTo>
-                  <a:lnTo>
-                    <a:pt x="358112" y="20361"/>
-                  </a:lnTo>
-                  <a:lnTo>
-                    <a:pt x="429735" y="20147"/>
-                  </a:lnTo>
-                  <a:lnTo>
-                    <a:pt x="501357" y="19933"/>
-                  </a:lnTo>
-                  <a:lnTo>
-                    <a:pt x="572980" y="19719"/>
-                  </a:lnTo>
-                  <a:lnTo>
-                    <a:pt x="644602" y="19505"/>
-                  </a:lnTo>
-                  <a:lnTo>
-                    <a:pt x="716225" y="19290"/>
-                  </a:lnTo>
-                  <a:lnTo>
-                    <a:pt x="787847" y="19076"/>
-                  </a:lnTo>
-                  <a:lnTo>
-                    <a:pt x="859470" y="18862"/>
-                  </a:lnTo>
-                  <a:lnTo>
-                    <a:pt x="931092" y="18647"/>
-                  </a:lnTo>
-                  <a:lnTo>
-                    <a:pt x="1002715" y="18433"/>
-                  </a:lnTo>
-                  <a:lnTo>
-                    <a:pt x="1074337" y="18218"/>
-                  </a:lnTo>
-                  <a:lnTo>
-                    <a:pt x="1145960" y="18004"/>
-                  </a:lnTo>
-                  <a:lnTo>
-                    <a:pt x="1217582" y="17789"/>
-                  </a:lnTo>
-                  <a:lnTo>
-                    <a:pt x="1289205" y="17575"/>
-                  </a:lnTo>
-                  <a:lnTo>
-                    <a:pt x="1360827" y="17360"/>
-                  </a:lnTo>
-                  <a:lnTo>
-                    <a:pt x="1432450" y="17145"/>
-                  </a:lnTo>
-                  <a:lnTo>
-                    <a:pt x="1504073" y="16930"/>
-                  </a:lnTo>
-                  <a:lnTo>
-                    <a:pt x="1575695" y="16715"/>
-                  </a:lnTo>
-                  <a:lnTo>
-                    <a:pt x="1647318" y="16500"/>
-                  </a:lnTo>
-                  <a:lnTo>
-                    <a:pt x="1718940" y="16285"/>
-                  </a:lnTo>
-                  <a:lnTo>
-                    <a:pt x="1790563" y="16070"/>
-                  </a:lnTo>
-                  <a:lnTo>
-                    <a:pt x="1862185" y="15855"/>
-                  </a:lnTo>
-                  <a:lnTo>
-                    <a:pt x="1933808" y="15640"/>
-                  </a:lnTo>
-                  <a:lnTo>
-                    <a:pt x="2005430" y="15425"/>
-                  </a:lnTo>
-                  <a:lnTo>
-                    <a:pt x="2077053" y="15210"/>
-                  </a:lnTo>
-                  <a:lnTo>
-                    <a:pt x="2148675" y="14994"/>
-                  </a:lnTo>
-                  <a:lnTo>
-                    <a:pt x="2220298" y="14779"/>
-                  </a:lnTo>
-                  <a:lnTo>
-                    <a:pt x="2291920" y="14563"/>
-                  </a:lnTo>
-                  <a:lnTo>
-                    <a:pt x="2363543" y="14348"/>
-                  </a:lnTo>
-                  <a:lnTo>
-                    <a:pt x="2435165" y="14132"/>
-                  </a:lnTo>
-                  <a:lnTo>
-                    <a:pt x="2506788" y="13917"/>
-                  </a:lnTo>
-                  <a:lnTo>
-                    <a:pt x="2578410" y="13701"/>
-                  </a:lnTo>
-                  <a:lnTo>
-                    <a:pt x="2650033" y="13485"/>
-                  </a:lnTo>
-                  <a:lnTo>
-                    <a:pt x="2721655" y="13269"/>
-                  </a:lnTo>
-                  <a:lnTo>
-                    <a:pt x="2793278" y="13054"/>
-                  </a:lnTo>
-                  <a:lnTo>
-                    <a:pt x="2864901" y="12838"/>
-                  </a:lnTo>
-                  <a:lnTo>
-                    <a:pt x="2936523" y="12622"/>
-                  </a:lnTo>
-                  <a:lnTo>
-                    <a:pt x="3008146" y="12406"/>
-                  </a:lnTo>
-                  <a:lnTo>
-                    <a:pt x="3079768" y="12190"/>
-                  </a:lnTo>
-                  <a:lnTo>
-                    <a:pt x="3151391" y="11974"/>
-                  </a:lnTo>
-                  <a:lnTo>
-                    <a:pt x="3223013" y="11757"/>
-                  </a:lnTo>
-                  <a:lnTo>
-                    <a:pt x="3294636" y="11541"/>
-                  </a:lnTo>
-                  <a:lnTo>
-                    <a:pt x="3366258" y="11325"/>
-                  </a:lnTo>
-                  <a:lnTo>
-                    <a:pt x="3437881" y="11108"/>
-                  </a:lnTo>
-                  <a:lnTo>
-                    <a:pt x="3509503" y="10892"/>
-                  </a:lnTo>
-                  <a:lnTo>
-                    <a:pt x="3581126" y="10676"/>
-                  </a:lnTo>
-                  <a:lnTo>
-                    <a:pt x="3652748" y="10459"/>
-                  </a:lnTo>
-                  <a:lnTo>
-                    <a:pt x="3724371" y="10242"/>
-                  </a:lnTo>
-                  <a:lnTo>
-                    <a:pt x="3795993" y="10026"/>
-                  </a:lnTo>
-                  <a:lnTo>
-                    <a:pt x="3867616" y="9809"/>
-                  </a:lnTo>
-                  <a:lnTo>
-                    <a:pt x="3939238" y="9592"/>
-                  </a:lnTo>
-                  <a:lnTo>
-                    <a:pt x="4010861" y="9376"/>
-                  </a:lnTo>
-                  <a:lnTo>
-                    <a:pt x="4082483" y="9159"/>
-                  </a:lnTo>
-                  <a:lnTo>
-                    <a:pt x="4154106" y="8942"/>
-                  </a:lnTo>
-                  <a:lnTo>
-                    <a:pt x="4225729" y="8725"/>
-                  </a:lnTo>
-                  <a:lnTo>
-                    <a:pt x="4297351" y="8508"/>
-                  </a:lnTo>
-                  <a:lnTo>
-                    <a:pt x="4368974" y="8291"/>
-                  </a:lnTo>
-                  <a:lnTo>
-                    <a:pt x="4440596" y="8074"/>
-                  </a:lnTo>
-                  <a:lnTo>
-                    <a:pt x="4512219" y="7856"/>
-                  </a:lnTo>
-                  <a:lnTo>
-                    <a:pt x="4583841" y="7639"/>
-                  </a:lnTo>
-                  <a:lnTo>
-                    <a:pt x="4655464" y="7422"/>
-                  </a:lnTo>
-                  <a:lnTo>
-                    <a:pt x="4727086" y="7204"/>
-                  </a:lnTo>
-                  <a:lnTo>
-                    <a:pt x="4798709" y="6987"/>
-                  </a:lnTo>
-                  <a:lnTo>
-                    <a:pt x="4870331" y="6770"/>
-                  </a:lnTo>
-                  <a:lnTo>
-                    <a:pt x="4941954" y="6552"/>
-                  </a:lnTo>
-                  <a:lnTo>
-                    <a:pt x="5013576" y="6334"/>
-                  </a:lnTo>
-                  <a:lnTo>
-                    <a:pt x="5085199" y="6117"/>
-                  </a:lnTo>
-                  <a:lnTo>
-                    <a:pt x="5156821" y="5899"/>
-                  </a:lnTo>
-                  <a:lnTo>
-                    <a:pt x="5228444" y="5681"/>
-                  </a:lnTo>
-                  <a:lnTo>
-                    <a:pt x="5300066" y="5464"/>
-                  </a:lnTo>
-                  <a:lnTo>
-                    <a:pt x="5371689" y="5246"/>
-                  </a:lnTo>
-                  <a:lnTo>
-                    <a:pt x="5443311" y="5028"/>
-                  </a:lnTo>
-                  <a:lnTo>
-                    <a:pt x="5514934" y="4810"/>
-                  </a:lnTo>
-                  <a:lnTo>
-                    <a:pt x="5586557" y="4592"/>
-                  </a:lnTo>
-                  <a:lnTo>
-                    <a:pt x="5658179" y="4374"/>
-                  </a:lnTo>
-                  <a:lnTo>
-                    <a:pt x="5729802" y="4155"/>
-                  </a:lnTo>
-                  <a:lnTo>
-                    <a:pt x="5801424" y="3937"/>
-                  </a:lnTo>
-                  <a:lnTo>
-                    <a:pt x="5873047" y="3719"/>
-                  </a:lnTo>
-                  <a:lnTo>
-                    <a:pt x="5944669" y="3501"/>
-                  </a:lnTo>
-                  <a:lnTo>
-                    <a:pt x="6016292" y="3282"/>
-                  </a:lnTo>
-                  <a:lnTo>
-                    <a:pt x="6087914" y="3064"/>
-                  </a:lnTo>
-                  <a:lnTo>
-                    <a:pt x="6159537" y="2845"/>
+                    <a:pt x="71622" y="21222"/>
+                  </a:lnTo>
+                  <a:lnTo>
+                    <a:pt x="143245" y="21008"/>
+                  </a:lnTo>
+                  <a:lnTo>
+                    <a:pt x="214867" y="20794"/>
+                  </a:lnTo>
+                  <a:lnTo>
+                    <a:pt x="286490" y="20580"/>
+                  </a:lnTo>
+                  <a:lnTo>
+                    <a:pt x="358112" y="20366"/>
+                  </a:lnTo>
+                  <a:lnTo>
+                    <a:pt x="429735" y="20152"/>
+                  </a:lnTo>
+                  <a:lnTo>
+                    <a:pt x="501357" y="19938"/>
+                  </a:lnTo>
+                  <a:lnTo>
+                    <a:pt x="572980" y="19724"/>
+                  </a:lnTo>
+                  <a:lnTo>
+                    <a:pt x="644602" y="19510"/>
+                  </a:lnTo>
+                  <a:lnTo>
+                    <a:pt x="716225" y="19296"/>
+                  </a:lnTo>
+                  <a:lnTo>
+                    <a:pt x="787847" y="19081"/>
+                  </a:lnTo>
+                  <a:lnTo>
+                    <a:pt x="859470" y="18867"/>
+                  </a:lnTo>
+                  <a:lnTo>
+                    <a:pt x="931092" y="18652"/>
+                  </a:lnTo>
+                  <a:lnTo>
+                    <a:pt x="1002715" y="18438"/>
+                  </a:lnTo>
+                  <a:lnTo>
+                    <a:pt x="1074337" y="18223"/>
+                  </a:lnTo>
+                  <a:lnTo>
+                    <a:pt x="1145960" y="18009"/>
+                  </a:lnTo>
+                  <a:lnTo>
+                    <a:pt x="1217582" y="17794"/>
+                  </a:lnTo>
+                  <a:lnTo>
+                    <a:pt x="1289205" y="17579"/>
+                  </a:lnTo>
+                  <a:lnTo>
+                    <a:pt x="1360827" y="17365"/>
+                  </a:lnTo>
+                  <a:lnTo>
+                    <a:pt x="1432450" y="17150"/>
+                  </a:lnTo>
+                  <a:lnTo>
+                    <a:pt x="1504073" y="16935"/>
+                  </a:lnTo>
+                  <a:lnTo>
+                    <a:pt x="1575695" y="16720"/>
+                  </a:lnTo>
+                  <a:lnTo>
+                    <a:pt x="1647318" y="16505"/>
+                  </a:lnTo>
+                  <a:lnTo>
+                    <a:pt x="1718940" y="16290"/>
+                  </a:lnTo>
+                  <a:lnTo>
+                    <a:pt x="1790563" y="16075"/>
+                  </a:lnTo>
+                  <a:lnTo>
+                    <a:pt x="1862185" y="15859"/>
+                  </a:lnTo>
+                  <a:lnTo>
+                    <a:pt x="1933808" y="15644"/>
+                  </a:lnTo>
+                  <a:lnTo>
+                    <a:pt x="2005430" y="15429"/>
+                  </a:lnTo>
+                  <a:lnTo>
+                    <a:pt x="2077053" y="15214"/>
+                  </a:lnTo>
+                  <a:lnTo>
+                    <a:pt x="2148675" y="14998"/>
+                  </a:lnTo>
+                  <a:lnTo>
+                    <a:pt x="2220298" y="14783"/>
+                  </a:lnTo>
+                  <a:lnTo>
+                    <a:pt x="2291920" y="14567"/>
+                  </a:lnTo>
+                  <a:lnTo>
+                    <a:pt x="2363543" y="14352"/>
+                  </a:lnTo>
+                  <a:lnTo>
+                    <a:pt x="2435165" y="14136"/>
+                  </a:lnTo>
+                  <a:lnTo>
+                    <a:pt x="2506788" y="13920"/>
+                  </a:lnTo>
+                  <a:lnTo>
+                    <a:pt x="2578410" y="13705"/>
+                  </a:lnTo>
+                  <a:lnTo>
+                    <a:pt x="2650033" y="13489"/>
+                  </a:lnTo>
+                  <a:lnTo>
+                    <a:pt x="2721655" y="13273"/>
+                  </a:lnTo>
+                  <a:lnTo>
+                    <a:pt x="2793278" y="13057"/>
+                  </a:lnTo>
+                  <a:lnTo>
+                    <a:pt x="2864901" y="12841"/>
+                  </a:lnTo>
+                  <a:lnTo>
+                    <a:pt x="2936523" y="12625"/>
+                  </a:lnTo>
+                  <a:lnTo>
+                    <a:pt x="3008146" y="12409"/>
+                  </a:lnTo>
+                  <a:lnTo>
+                    <a:pt x="3079768" y="12193"/>
+                  </a:lnTo>
+                  <a:lnTo>
+                    <a:pt x="3151391" y="11977"/>
+                  </a:lnTo>
+                  <a:lnTo>
+                    <a:pt x="3223013" y="11761"/>
+                  </a:lnTo>
+                  <a:lnTo>
+                    <a:pt x="3294636" y="11544"/>
+                  </a:lnTo>
+                  <a:lnTo>
+                    <a:pt x="3366258" y="11328"/>
+                  </a:lnTo>
+                  <a:lnTo>
+                    <a:pt x="3437881" y="11111"/>
+                  </a:lnTo>
+                  <a:lnTo>
+                    <a:pt x="3509503" y="10895"/>
+                  </a:lnTo>
+                  <a:lnTo>
+                    <a:pt x="3581126" y="10678"/>
+                  </a:lnTo>
+                  <a:lnTo>
+                    <a:pt x="3652748" y="10462"/>
+                  </a:lnTo>
+                  <a:lnTo>
+                    <a:pt x="3724371" y="10245"/>
+                  </a:lnTo>
+                  <a:lnTo>
+                    <a:pt x="3795993" y="10029"/>
+                  </a:lnTo>
+                  <a:lnTo>
+                    <a:pt x="3867616" y="9812"/>
+                  </a:lnTo>
+                  <a:lnTo>
+                    <a:pt x="3939238" y="9595"/>
+                  </a:lnTo>
+                  <a:lnTo>
+                    <a:pt x="4010861" y="9378"/>
+                  </a:lnTo>
+                  <a:lnTo>
+                    <a:pt x="4082483" y="9161"/>
+                  </a:lnTo>
+                  <a:lnTo>
+                    <a:pt x="4154106" y="8944"/>
+                  </a:lnTo>
+                  <a:lnTo>
+                    <a:pt x="4225729" y="8727"/>
+                  </a:lnTo>
+                  <a:lnTo>
+                    <a:pt x="4297351" y="8510"/>
+                  </a:lnTo>
+                  <a:lnTo>
+                    <a:pt x="4368974" y="8293"/>
+                  </a:lnTo>
+                  <a:lnTo>
+                    <a:pt x="4440596" y="8076"/>
+                  </a:lnTo>
+                  <a:lnTo>
+                    <a:pt x="4512219" y="7859"/>
+                  </a:lnTo>
+                  <a:lnTo>
+                    <a:pt x="4583841" y="7641"/>
+                  </a:lnTo>
+                  <a:lnTo>
+                    <a:pt x="4655464" y="7424"/>
+                  </a:lnTo>
+                  <a:lnTo>
+                    <a:pt x="4727086" y="7206"/>
+                  </a:lnTo>
+                  <a:lnTo>
+                    <a:pt x="4798709" y="6989"/>
+                  </a:lnTo>
+                  <a:lnTo>
+                    <a:pt x="4870331" y="6771"/>
+                  </a:lnTo>
+                  <a:lnTo>
+                    <a:pt x="4941954" y="6554"/>
+                  </a:lnTo>
+                  <a:lnTo>
+                    <a:pt x="5013576" y="6336"/>
+                  </a:lnTo>
+                  <a:lnTo>
+                    <a:pt x="5085199" y="6118"/>
+                  </a:lnTo>
+                  <a:lnTo>
+                    <a:pt x="5156821" y="5901"/>
+                  </a:lnTo>
+                  <a:lnTo>
+                    <a:pt x="5228444" y="5683"/>
+                  </a:lnTo>
+                  <a:lnTo>
+                    <a:pt x="5300066" y="5465"/>
+                  </a:lnTo>
+                  <a:lnTo>
+                    <a:pt x="5371689" y="5247"/>
+                  </a:lnTo>
+                  <a:lnTo>
+                    <a:pt x="5443311" y="5029"/>
+                  </a:lnTo>
+                  <a:lnTo>
+                    <a:pt x="5514934" y="4811"/>
+                  </a:lnTo>
+                  <a:lnTo>
+                    <a:pt x="5586557" y="4593"/>
+                  </a:lnTo>
+                  <a:lnTo>
+                    <a:pt x="5658179" y="4375"/>
+                  </a:lnTo>
+                  <a:lnTo>
+                    <a:pt x="5729802" y="4157"/>
+                  </a:lnTo>
+                  <a:lnTo>
+                    <a:pt x="5801424" y="3938"/>
+                  </a:lnTo>
+                  <a:lnTo>
+                    <a:pt x="5873047" y="3720"/>
+                  </a:lnTo>
+                  <a:lnTo>
+                    <a:pt x="5944669" y="3502"/>
+                  </a:lnTo>
+                  <a:lnTo>
+                    <a:pt x="6016292" y="3283"/>
+                  </a:lnTo>
+                  <a:lnTo>
+                    <a:pt x="6087914" y="3065"/>
+                  </a:lnTo>
+                  <a:lnTo>
+                    <a:pt x="6159537" y="2846"/>
                   </a:lnTo>
                   <a:lnTo>
                     <a:pt x="6231159" y="2627"/>
                   </a:lnTo>
                   <a:lnTo>
-                    <a:pt x="6302782" y="2408"/>
-                  </a:lnTo>
-                  <a:lnTo>
-                    <a:pt x="6374404" y="2189"/>
+                    <a:pt x="6302782" y="2409"/>
+                  </a:lnTo>
+                  <a:lnTo>
+                    <a:pt x="6374404" y="2190"/>
                   </a:lnTo>
                   <a:lnTo>
                     <a:pt x="6446027" y="1971"/>
@@ -4387,7 +4381,7 @@
           </p:nvSpPr>
           <p:spPr>
             <a:xfrm>
-              <a:off x="4164901" y="2073503"/>
+              <a:off x="4170171" y="2073503"/>
               <a:ext cx="0" cy="3649639"/>
             </a:xfrm>
             <a:custGeom>
@@ -4660,7 +4654,7 @@
           </p:nvSpPr>
           <p:spPr>
             <a:xfrm>
-              <a:off x="2284877" y="5785772"/>
+              <a:off x="2285456" y="5785772"/>
               <a:ext cx="161574" cy="80101"/>
             </a:xfrm>
             <a:prstGeom prst="rect">
@@ -4706,7 +4700,7 @@
           </p:nvSpPr>
           <p:spPr>
             <a:xfrm>
-              <a:off x="4138944" y="5785772"/>
+              <a:off x="4139043" y="5785772"/>
               <a:ext cx="62179" cy="80101"/>
             </a:xfrm>
             <a:prstGeom prst="rect">
@@ -4752,7 +4746,7 @@
           </p:nvSpPr>
           <p:spPr>
             <a:xfrm>
-              <a:off x="5912223" y="5785772"/>
+              <a:off x="5911843" y="5785772"/>
               <a:ext cx="124358" cy="80101"/>
             </a:xfrm>
             <a:prstGeom prst="rect">
@@ -4798,7 +4792,7 @@
           </p:nvSpPr>
           <p:spPr>
             <a:xfrm>
-              <a:off x="7716592" y="5785772"/>
+              <a:off x="7715733" y="5785772"/>
               <a:ext cx="124358" cy="80101"/>
             </a:xfrm>
             <a:prstGeom prst="rect">
@@ -4969,7 +4963,7 @@
                   <a:latin typeface="Helvetica"/>
                   <a:cs typeface="Helvetica"/>
                 </a:rPr>
-                <a:t>subHR per 10 % decline: 1.00 (0.49-2.02), p = 0.993  |  per IQR decline (Δ = 27.4 %): 0.99 (0.14-6.85)  |  IQR: [-12.6, 14.8] %</a:t>
+                <a:t>subHR per 10 % decline: 1.00 (0.49-2.02), p = 0.993  |  per IQR decline (Δ = 27.2 %): 0.99 (0.15-6.74)  |  IQR: [-12.3, 14.9] %</a:t>
               </a:r>
             </a:p>
           </p:txBody>
